--- a/reports/05-chart-insight.pptx
+++ b/reports/05-chart-insight.pptx
@@ -107,7 +107,7 @@
   <p:extLst>
     <p:ext uri="{521415D9-36F7-43E2-AB2F-B90AF26B5E84}">
       <p14:sectionLst xmlns:p14="http://schemas.microsoft.com/office/powerpoint/2010/main">
-        <p14:section name="Chart-led insight" id="{6d5ec853-cb8d-1f68-b233-b29d0e0727c3}">
+        <p14:section name="Chart-led insight" id="{cffd0ce6-5fdf-70d9-87da-b96d23be9947}">
           <p14:sldIdLst>
             <p14:sldId id="256"/>
           </p14:sldIdLst>
